--- a/NLP UNIT 1/CO1_AT2_NLP.pptx
+++ b/NLP UNIT 1/CO1_AT2_NLP.pptx
@@ -5,7 +5,7 @@
     <p:sldMasterId id="2147483648" r:id="rId1"/>
   </p:sldMasterIdLst>
   <p:notesMasterIdLst>
-    <p:notesMasterId r:id="rId8"/>
+    <p:notesMasterId r:id="rId9"/>
   </p:notesMasterIdLst>
   <p:sldIdLst>
     <p:sldId id="256" r:id="rId2"/>
@@ -14,6 +14,7 @@
     <p:sldId id="259" r:id="rId5"/>
     <p:sldId id="260" r:id="rId6"/>
     <p:sldId id="261" r:id="rId7"/>
+    <p:sldId id="262" r:id="rId8"/>
   </p:sldIdLst>
   <p:sldSz cx="12192000" cy="6858000"/>
   <p:notesSz cx="6858000" cy="12192000"/>
@@ -120,6 +121,7 @@
             <p14:sldId id="259"/>
             <p14:sldId id="260"/>
             <p14:sldId id="261"/>
+            <p14:sldId id="262"/>
           </p14:sldIdLst>
         </p14:section>
       </p14:sectionLst>
@@ -129,6 +131,43 @@
     </p:ext>
   </p:extLst>
 </p:presentation>
+</file>
+
+<file path=ppt/changesInfos/changesInfo1.xml><?xml version="1.0" encoding="utf-8"?>
+<pc:chgInfo xmlns:a="http://schemas.openxmlformats.org/drawingml/2006/main" xmlns:r="http://schemas.openxmlformats.org/officeDocument/2006/relationships" xmlns:ac="http://schemas.microsoft.com/office/drawing/2013/main/command" xmlns:pc="http://schemas.microsoft.com/office/powerpoint/2013/main/command">
+  <pc:docChgLst>
+    <pc:chgData name="jahanarajasminmd@outlook.com" userId="ec017e911fd92c49" providerId="LiveId" clId="{82FC30EC-5734-4796-BE36-149DAAA5F67E}"/>
+    <pc:docChg chg="custSel addSld modSld modSection">
+      <pc:chgData name="jahanarajasminmd@outlook.com" userId="ec017e911fd92c49" providerId="LiveId" clId="{82FC30EC-5734-4796-BE36-149DAAA5F67E}" dt="2026-10-27T04:45:53.233" v="8" actId="1076"/>
+      <pc:docMkLst>
+        <pc:docMk/>
+      </pc:docMkLst>
+      <pc:sldChg chg="addSp delSp modSp new mod">
+        <pc:chgData name="jahanarajasminmd@outlook.com" userId="ec017e911fd92c49" providerId="LiveId" clId="{82FC30EC-5734-4796-BE36-149DAAA5F67E}" dt="2026-10-27T04:45:53.233" v="8" actId="1076"/>
+        <pc:sldMkLst>
+          <pc:docMk/>
+          <pc:sldMk cId="971547848" sldId="262"/>
+        </pc:sldMkLst>
+        <pc:spChg chg="del">
+          <ac:chgData name="jahanarajasminmd@outlook.com" userId="ec017e911fd92c49" providerId="LiveId" clId="{82FC30EC-5734-4796-BE36-149DAAA5F67E}" dt="2026-10-27T04:45:51.641" v="7" actId="21"/>
+          <ac:spMkLst>
+            <pc:docMk/>
+            <pc:sldMk cId="971547848" sldId="262"/>
+            <ac:spMk id="2" creationId="{4ADD3DEB-084F-03EB-07D7-703D12870D05}"/>
+          </ac:spMkLst>
+        </pc:spChg>
+        <pc:picChg chg="add mod">
+          <ac:chgData name="jahanarajasminmd@outlook.com" userId="ec017e911fd92c49" providerId="LiveId" clId="{82FC30EC-5734-4796-BE36-149DAAA5F67E}" dt="2026-10-27T04:45:53.233" v="8" actId="1076"/>
+          <ac:picMkLst>
+            <pc:docMk/>
+            <pc:sldMk cId="971547848" sldId="262"/>
+            <ac:picMk id="4" creationId="{3B5A8063-DBD0-CDDA-AACB-88A029FF08FC}"/>
+          </ac:picMkLst>
+        </pc:picChg>
+      </pc:sldChg>
+    </pc:docChg>
+  </pc:docChgLst>
+</pc:chgInfo>
 </file>
 
 <file path=ppt/notesMasters/notesMaster1.xml><?xml version="1.0" encoding="utf-8"?>
@@ -918,7 +957,7 @@
           </a:prstGeom>
           <a:extLst>
             <a:ext uri="{C572A759-6A51-4108-AA02-DFA0A04FC94B}">
-              <ma14:wrappingTextBoxFlag xmlns="" xmlns:ma14="http://schemas.microsoft.com/office/mac/drawingml/2011/main" val="0"/>
+              <ma14:wrappingTextBoxFlag xmlns:ma14="http://schemas.microsoft.com/office/mac/drawingml/2011/main" xmlns="" val="0"/>
             </a:ext>
           </a:extLst>
         </p:spPr>
@@ -1037,7 +1076,7 @@
           </a:prstGeom>
           <a:extLst>
             <a:ext uri="{C572A759-6A51-4108-AA02-DFA0A04FC94B}">
-              <ma14:wrappingTextBoxFlag xmlns="" xmlns:ma14="http://schemas.microsoft.com/office/mac/drawingml/2011/main" val="0"/>
+              <ma14:wrappingTextBoxFlag xmlns:ma14="http://schemas.microsoft.com/office/mac/drawingml/2011/main" xmlns="" val="0"/>
             </a:ext>
           </a:extLst>
         </p:spPr>
@@ -1186,7 +1225,7 @@
           </a:prstGeom>
           <a:extLst>
             <a:ext uri="{C572A759-6A51-4108-AA02-DFA0A04FC94B}">
-              <ma14:wrappingTextBoxFlag xmlns="" xmlns:ma14="http://schemas.microsoft.com/office/mac/drawingml/2011/main" val="0"/>
+              <ma14:wrappingTextBoxFlag xmlns:ma14="http://schemas.microsoft.com/office/mac/drawingml/2011/main" xmlns="" val="0"/>
             </a:ext>
           </a:extLst>
         </p:spPr>
@@ -2801,7 +2840,7 @@
           </a:prstGeom>
           <a:extLst>
             <a:ext uri="{C572A759-6A51-4108-AA02-DFA0A04FC94B}">
-              <ma14:wrappingTextBoxFlag xmlns="" xmlns:ma14="http://schemas.microsoft.com/office/mac/drawingml/2011/main" val="0"/>
+              <ma14:wrappingTextBoxFlag xmlns:ma14="http://schemas.microsoft.com/office/mac/drawingml/2011/main" xmlns="" val="0"/>
             </a:ext>
           </a:extLst>
         </p:spPr>
@@ -4363,7 +4402,7 @@
           </a:prstGeom>
           <a:extLst>
             <a:ext uri="{C572A759-6A51-4108-AA02-DFA0A04FC94B}">
-              <ma14:wrappingTextBoxFlag xmlns="" xmlns:ma14="http://schemas.microsoft.com/office/mac/drawingml/2011/main" val="0"/>
+              <ma14:wrappingTextBoxFlag xmlns:ma14="http://schemas.microsoft.com/office/mac/drawingml/2011/main" xmlns="" val="0"/>
             </a:ext>
           </a:extLst>
         </p:spPr>
@@ -6048,7 +6087,7 @@
           </a:prstGeom>
           <a:extLst>
             <a:ext uri="{C572A759-6A51-4108-AA02-DFA0A04FC94B}">
-              <ma14:wrappingTextBoxFlag xmlns="" xmlns:ma14="http://schemas.microsoft.com/office/mac/drawingml/2011/main" val="0"/>
+              <ma14:wrappingTextBoxFlag xmlns:ma14="http://schemas.microsoft.com/office/mac/drawingml/2011/main" xmlns="" val="0"/>
             </a:ext>
           </a:extLst>
         </p:spPr>
@@ -7154,7 +7193,7 @@
           </a:prstGeom>
           <a:extLst>
             <a:ext uri="{C572A759-6A51-4108-AA02-DFA0A04FC94B}">
-              <ma14:wrappingTextBoxFlag xmlns="" xmlns:ma14="http://schemas.microsoft.com/office/mac/drawingml/2011/main" val="0"/>
+              <ma14:wrappingTextBoxFlag xmlns:ma14="http://schemas.microsoft.com/office/mac/drawingml/2011/main" xmlns="" val="0"/>
             </a:ext>
           </a:extLst>
         </p:spPr>
@@ -8027,7 +8066,7 @@
           </a:prstGeom>
           <a:extLst>
             <a:ext uri="{C572A759-6A51-4108-AA02-DFA0A04FC94B}">
-              <ma14:wrappingTextBoxFlag xmlns="" xmlns:ma14="http://schemas.microsoft.com/office/mac/drawingml/2011/main" val="0"/>
+              <ma14:wrappingTextBoxFlag xmlns:ma14="http://schemas.microsoft.com/office/mac/drawingml/2011/main" xmlns="" val="0"/>
             </a:ext>
           </a:extLst>
         </p:spPr>
@@ -8053,6 +8092,66 @@
         </p:txBody>
       </p:sp>
     </p:spTree>
+  </p:cSld>
+  <p:clrMapOvr>
+    <a:masterClrMapping/>
+  </p:clrMapOvr>
+</p:sld>
+</file>
+
+<file path=ppt/slides/slide7.xml><?xml version="1.0" encoding="utf-8"?>
+<p:sld xmlns:a="http://schemas.openxmlformats.org/drawingml/2006/main" xmlns:r="http://schemas.openxmlformats.org/officeDocument/2006/relationships" xmlns:p="http://schemas.openxmlformats.org/presentationml/2006/main">
+  <p:cSld>
+    <p:spTree>
+      <p:nvGrpSpPr>
+        <p:cNvPr id="1" name=""/>
+        <p:cNvGrpSpPr/>
+        <p:nvPr/>
+      </p:nvGrpSpPr>
+      <p:grpSpPr>
+        <a:xfrm>
+          <a:off x="0" y="0"/>
+          <a:ext cx="0" cy="0"/>
+          <a:chOff x="0" y="0"/>
+          <a:chExt cx="0" cy="0"/>
+        </a:xfrm>
+      </p:grpSpPr>
+      <p:pic>
+        <p:nvPicPr>
+          <p:cNvPr id="4" name="Picture 3">
+            <a:extLst>
+              <a:ext uri="{FF2B5EF4-FFF2-40B4-BE49-F238E27FC236}">
+                <a16:creationId xmlns:a16="http://schemas.microsoft.com/office/drawing/2014/main" id="{3B5A8063-DBD0-CDDA-AACB-88A029FF08FC}"/>
+              </a:ext>
+            </a:extLst>
+          </p:cNvPr>
+          <p:cNvPicPr>
+            <a:picLocks noChangeAspect="1"/>
+          </p:cNvPicPr>
+          <p:nvPr/>
+        </p:nvPicPr>
+        <p:blipFill>
+          <a:blip r:embed="rId2"/>
+          <a:stretch>
+            <a:fillRect/>
+          </a:stretch>
+        </p:blipFill>
+        <p:spPr>
+          <a:xfrm>
+            <a:off x="2976664" y="571500"/>
+            <a:ext cx="6001966" cy="5715000"/>
+          </a:xfrm>
+          <a:prstGeom prst="rect">
+            <a:avLst/>
+          </a:prstGeom>
+        </p:spPr>
+      </p:pic>
+    </p:spTree>
+    <p:extLst>
+      <p:ext uri="{BB962C8B-B14F-4D97-AF65-F5344CB8AC3E}">
+        <p14:creationId xmlns:p14="http://schemas.microsoft.com/office/powerpoint/2010/main" val="971547848"/>
+      </p:ext>
+    </p:extLst>
   </p:cSld>
   <p:clrMapOvr>
     <a:masterClrMapping/>
